--- a/docs/content/pca/pca_activity.pptx
+++ b/docs/content/pca/pca_activity.pptx
@@ -13674,7 +13674,7 @@
                 </a:solidFill>
                 <a:latin typeface="Courier"/>
               </a:rPr>
-              <a:t>"steelblue"</a:t>
+              <a:t>"darkblue"</a:t>
             </a:r>
             <a:r>
               <a:rPr>
